--- a/images/pipeline.pptx
+++ b/images/pipeline.pptx
@@ -249,7 +249,7 @@
       <p15:notesGuideLst xmlns:p15="http://schemas.microsoft.com/office/powerpoint/2012/main"/>
     </p:ext>
     <p:ext uri="GoogleSlidesCustomDataVersion2">
-      <go:slidesCustomData xmlns:go="http://customooxmlschemas.google.com/" xmlns:ahyp="http://schemas.microsoft.com/office/drawing/2018/hyperlinkcolor" xmlns:p15="http://schemas.microsoft.com/office/powerpoint/2012/main" xmlns:p14="http://schemas.microsoft.com/office/powerpoint/2010/main" xmlns:com="http://schemas.openxmlformats.org/drawingml/2006/compatibility" xmlns:pvml="urn:schemas-microsoft-com:office:powerpoint" xmlns:v="urn:schemas-microsoft-com:vml" xmlns:o="urn:schemas-microsoft-com:office:office" xmlns:dgm="http://schemas.openxmlformats.org/drawingml/2006/diagram" xmlns:c="http://schemas.openxmlformats.org/drawingml/2006/chart" xmlns:mv="urn:schemas-microsoft-com:mac:vml" xmlns:mc="http://schemas.openxmlformats.org/markup-compatibility/2006" xmlns="" r:id="rId62" roundtripDataSignature="AMtx7mjU1IlTTZD3bgpzhqsac+JpuNgN8A=="/>
+      <go:slidesCustomData xmlns="" xmlns:mc="http://schemas.openxmlformats.org/markup-compatibility/2006" xmlns:mv="urn:schemas-microsoft-com:mac:vml" xmlns:c="http://schemas.openxmlformats.org/drawingml/2006/chart" xmlns:dgm="http://schemas.openxmlformats.org/drawingml/2006/diagram" xmlns:o="urn:schemas-microsoft-com:office:office" xmlns:v="urn:schemas-microsoft-com:vml" xmlns:pvml="urn:schemas-microsoft-com:office:powerpoint" xmlns:com="http://schemas.openxmlformats.org/drawingml/2006/compatibility" xmlns:p14="http://schemas.microsoft.com/office/powerpoint/2010/main" xmlns:p15="http://schemas.microsoft.com/office/powerpoint/2012/main" xmlns:ahyp="http://schemas.microsoft.com/office/drawing/2018/hyperlinkcolor" xmlns:go="http://customooxmlschemas.google.com/" r:id="rId62" roundtripDataSignature="AMtx7mjU1IlTTZD3bgpzhqsac+JpuNgN8A=="/>
     </p:ext>
   </p:extLst>
 </p:presentation>
@@ -2834,7 +2834,7 @@
                 <a:rPr lang="en-PT" sz="2800" b="1" dirty="0">
                   <a:latin typeface="PT Mono" panose="02060509020205020204" pitchFamily="49" charset="77"/>
                 </a:rPr>
-                <a:t>Web scratching</a:t>
+                <a:t>Web scraping</a:t>
               </a:r>
             </a:p>
           </p:txBody>
